--- a/docs/영업지원도구6종_사내공모전.pptx
+++ b/docs/영업지원도구6종_사내공모전.pptx
@@ -34,9 +34,10 @@
     <p:sldId id="282" r:id="rId28"/>
     <p:sldId id="283" r:id="rId29"/>
     <p:sldId id="284" r:id="rId30"/>
+    <p:sldId id="285" r:id="rId31"/>
   </p:sldIdLst>
   <p:notesMasterIdLst>
-    <p:notesMasterId r:id="rId31"/>
+    <p:notesMasterId r:id="rId32"/>
   </p:notesMasterIdLst>
   <p:sldSz cx="12192000" cy="6858000"/>
   <p:notesSz cx="6858000" cy="12192000"/>
@@ -530,19 +531,7 @@
           <a:p>
             <a:r>
               <a:rPr lang="en-US" dirty="0"/>
-              <a:t>meritz   메리츠화재
-세일즈혁신TF · AI추진파트
-현장이 만든
-영업지원 도구 6종
-전속영업채널(TA/PA)의 상담을 데이터로 뒷받침하는 6개의 자체 개발 도구 · 신규 「통합치료비 시뮬레이션」 추가
-특약검색기
-보상시뮬레이터
-상품 라인업
-프롬프트 라이브러리
-명패 제작기
-통합치료비 시뮬레이션
-2026. 09.   ·   세일즈혁신TF  이헌수
-hunx11-sys.github.io/MeAI</a:t>
+              <a:t/>
             </a:r>
             <a:endParaRPr lang="en-US" dirty="0"/>
           </a:p>
@@ -630,30 +619,7 @@
           <a:p>
             <a:r>
               <a:rPr lang="en-US" dirty="0"/>
-              <a:t>TOOL 01 · 특약검색기
-약관 본문 · 분류표 · 보장 분석까지 한 화면에서
-📖
-약관 본문 951건 · 분류표 216개
-약관 PDF 원문에서 특약 제목 기준으로 재추출 → 잘림 없는 전문 · 관련 KCD 코드·질병명 자동 연결
-⚠️
-사각지대 자동 검출
-“뇌졸중” 중 I63 뇌경색증 미보장처럼 일부만 보장되는 병명을 코드로 적시하고, 메우는 특약을 추천
-⤴️
-상위호환 특약 제안
-보장 질병을 전부 포함하고 더 넓게 보장하는 특약을 포함관계로 증명해 업셀링 근거 제시
-📋
-MeAI 프롬프트 복사
-특약 실데이터를 주입한 완성형 프롬프트를 클릭 한 번에 복사 → MeAI에 붙여넣기
-🎯
-표적항암 6종류
-💉
-수술비 3종 비교
-🏥
-상급종합 지도
-📜
-상품 히스토리
-메리츠화재 · 세일즈혁신TF
-10</a:t>
+              <a:t/>
             </a:r>
             <a:endParaRPr lang="en-US" dirty="0"/>
           </a:p>
@@ -741,27 +707,7 @@
           <a:p>
             <a:r>
               <a:rPr lang="en-US" dirty="0"/>
-              <a:t>TOOL 02
-보상시뮬레이터
-질병·사고를 입력하면 어떤 특약에서 보상받는지, 치료 여정 순서대로
-위암 · 뇌졸중 · 골절처럼 병명이나 KCD 코드, 초성만 쳐도 됩니다. 자주 찾는 질병·사고 26종은 원클릭.
-🩺
-이중 검색 · 자동완성
-병명·KCD 코드·초성 모두 지원, ‘위암’만 입력해도 C16 매칭
-🧭
-치료 여정 타임라인
-진단 → 검사 → 수술 → 입원 → 치료 → 재활 단계별 특약 배치
-📚
-전수 매칭 · 상품별 분류
-반응하는 특약을 빠짐없이 추출, 모든 질병 공통 특약도 표시
-🔪
-예상 수술종류 자동 분류
-1-5종·1-7종 수술분류표 원문 기준으로 종수 제시
-⚠️
-부분보장 경고 → 업셀링
-일부만 보장되면 미보장을 코드로 적시, 빈 단계가 판매 근거
-메리츠화재 · 세일즈혁신TF
-11</a:t>
+              <a:t/>
             </a:r>
             <a:endParaRPr lang="en-US" dirty="0"/>
           </a:p>
@@ -849,27 +795,7 @@
           <a:p>
             <a:r>
               <a:rPr lang="en-US" dirty="0"/>
-              <a:t>TOOL 03
-상품 라인업
-장기상품 50종을 조건으로 좁히고, 알릴의무 표를 바로 확인
-상품구분(통합·간편·전용·단품·펫·재물·실손)과 심사·고지유형(일반·간편·건강고지·태아·단체·화재·반려동물)으로 필터링. 상품명을 누르면 상세가 펼쳐집니다.
-🔘
-버튼 필터 33개 · 실시간 건수
-그룹 내 OR · 그룹 간 AND, 조건 바꾸는 즉시 상품 수 표시
-📋
-알릴의무 표
-기간/고지대상 2열 표 · 고지유형 배지 · 예외·특례 분리
-💊
-납입면제 · 인수플랜 · 상품특징
-상품별 면제 요건과 핵심 소구 포인트 정리
-🔄
-알릴의무 유형별 역방향 탐색
-“이 병력이면 어떤 상품?” 유병자 상담 대응
-🔎
-상품명·특징·플랜·고지내용 검색
-검색어 하나로 상품 전체를 훑기
-메리츠화재 · 세일즈혁신TF
-12</a:t>
+              <a:t/>
             </a:r>
             <a:endParaRPr lang="en-US" dirty="0"/>
           </a:p>
@@ -957,24 +883,7 @@
           <a:p>
             <a:r>
               <a:rPr lang="en-US" dirty="0"/>
-              <a:t>TOOL 04
-프롬프트 라이브러리
-검증된 270개 프롬프트 · 3중 필터 · 원클릭 복사
-대주제(상품지식·실전영업·배경지식·업무지원) × 영업단계(고객발굴 → 사후관리) × 소주제로 ‘지금 상황’에 맞는 프롬프트를 바로 찾습니다.
-🧩
-3중 필터
-대주제 · 영업단계 · 소주제 + 해시태그 · 키워드 검색
-📋
-원클릭 복사 → MeAI
-카드를 눌러 전문 확인, 복사 후 MeAI에 붙여넣기만
-✅
-MeAI 최적화 문구
-실제 영업 상황에 맞춰 검증된 270개
-🔗
-검색기·시뮬레이터 연동
-도구 결과를 프롬프트에 결합하면 보장분석·리모델링 완성
-메리츠화재 · 세일즈혁신TF
-13</a:t>
+              <a:t/>
             </a:r>
             <a:endParaRPr lang="en-US" dirty="0"/>
           </a:p>
@@ -1062,27 +971,7 @@
           <a:p>
             <a:r>
               <a:rPr lang="en-US" dirty="0"/>
-              <a:t>TOOL 05
-명패 제작기
-엑셀 명단 한 장 → 프리미엄 명패 자동 생성
-삼각대 명패 150×70mm는 A4 한 장에 4개, 폼텍 라벨 스티커 규격으로 바꾸면 이름표·좌석표·명찰까지. 외부 연결 0으로 폐쇄망·오프라인에서 그대로 동작합니다.
-📂
-엑셀 첫 줄 = 제목
-이름·소속·기타(직함) 열만 있으면 자동 조판 · 샘플 양식 제공
-🎨
-행사명 · 테마 · 글꼴 · 로고
-라이트/다크 · 이름 글꼴 5종 · 공식 로고 · 재단선 on/off
-🏷️
-폼텍 라벨 규격
-제품번호 선택 시 칸 배치 자동 · 미세조정 · 시험 출력 안내
-🖨️
-A4 인쇄 / PDF 저장
-미리보기가 그대로 인쇄, 인쇄창에서 PDF 저장 가능
-🔒
-개인정보 미저장
-명단은 화면에서만 처리 · 서버 전송·저장 없음
-메리츠화재 · 세일즈혁신TF
-14</a:t>
+              <a:t/>
             </a:r>
             <a:endParaRPr lang="en-US" dirty="0"/>
           </a:p>
@@ -1170,28 +1059,7 @@
           <a:p>
             <a:r>
               <a:rPr lang="en-US" dirty="0"/>
-              <a:t>TOOL 06
-통합치료비 시뮬레이션
-“위암이면 통합치료비로 얼마 받아요?” — 치료 단계별로 즉답
-통합간편건강보험 2607 약관의 통합치료비 특약 12종(암 9 · 뇌심장 3)을 지급금액표 그대로 계산합니다. 질병명·KCD·초성 검색, 자주 찾는 질병 원클릭.
-🧩
-내 통합치료비 조합
-기본 조합(암 기본형 1억 · 암전후 4천 · 특정순환계 1억 · 주요손상 3천)을 자유롭게 변경
-🧭
-질병별 다빈도 치료 과정
-위암: 내시경 절제 / 로봇 절제+항암 / 진행성 / 전이·재발 — 골라서 비교
-💰
-1년 동안 받는 통합치료비
-검사·수술·항암·비급여 항목별 지급액을 특약별로 합산, 연간 한도 자동 적용
-⏳
-가입 후 1년 이내 토글
-1년 감액(50%) 특약과 암 90일 대기 반영
-🧺
-내가 조합 만들기
-받을 치료를 직접 담아 반복 치료까지 계산
-기준 약관 : 무배당 메리츠 통합간편건강보험(세만기형) 2607 통합간편심사형 · 예시 금액은 약관 지급금액표 기준
-메리츠화재 · 세일즈혁신TF
-15</a:t>
+              <a:t/>
             </a:r>
             <a:endParaRPr lang="en-US" dirty="0"/>
           </a:p>
@@ -1279,25 +1147,7 @@
           <a:p>
             <a:r>
               <a:rPr lang="en-US" dirty="0"/>
-              <a:t>TOOL 06 · 통합치료비 시뮬레이션
-치료 행위마다 “어느 특약에서 얼마” — 쉬운 말 풀이와 함께
-🧾
-치료 단계별 금액
-단계마다 특약·항목·횟수·금액을 표시. “같은 해 두 번째 검사라 0원” 같은 사유까지
-❓
-의료 용어 쉬운 풀이
-ESD · IMRT · ECMO 등 치료명을 누르면 한 줄 설명
-🔀
-조합 바꾸기
-암 계열 · 뇌심장 계열 12종을 스위치로 켜고 가입금액 구간 선택
-🧺
-내가 만드는 치료 조합
-검사·수술·항암을 직접 담아 “이 치료 과정이면” 즉시 합계
-📌
-비급여 · 병원조건 · 표적항암 배지
-지급 조건이 다른 항목은 배지로 구분, 미지급 사유를 문장으로
-메리츠화재 · 세일즈혁신TF
-16</a:t>
+              <a:t/>
             </a:r>
             <a:endParaRPr lang="en-US" dirty="0"/>
           </a:p>
@@ -1385,31 +1235,7 @@
           <a:p>
             <a:r>
               <a:rPr lang="en-US" dirty="0"/>
-              <a:t>TOOL 06 · 통합치료비 시뮬레이션
-5년 치료 계획 · 가입금액 비교 · 보장표 — 설계 근거가 숫자로
-12종
-특약 수
-암 9 · 뇌심장 3
-30+
-질병 예시
-암·뇌·심장·양성
-📆
-5년 치료 계획으로 보면
-재발·전이로 치료가 이어지는 경우, 해마다 연간 한도가 새로 적용되어 5년 합계를 산출
-📊
-가입금액을 바꾸면
-같은 치료 과정을 4천만·8천만·1억 구간별로 계산, 누르면 조합에 즉시 반영
-📋
-보장표 보기
-특약별 통합치료항목 × 가입금액 지급금액표 · 지금 과정에서 지급되는 항목 표시
-🔔
-꼭 알아두세요
-연 1회 한도 · 경피적 시술의 수술 인정 · 호르몬 치료제 제외 등 약관 유의사항 자동 안내
-🎯
-설계 대화로 연결
-“1억으로 올리면 이 치료에서 +250만원” — 증액·추가 가입 근거가 숫자로
-메리츠화재 · 세일즈혁신TF
-17</a:t>
+              <a:t/>
             </a:r>
             <a:endParaRPr lang="en-US" dirty="0"/>
           </a:p>
@@ -1497,41 +1323,7 @@
           <a:p>
             <a:r>
               <a:rPr lang="en-US" dirty="0"/>
-              <a:t>통합 효과
-여섯 개 도구가 하나의 영업 흐름으로 연결됩니다
-📦
-1
-상품 라인업
-고객 조건에 맞는 상품과 알릴의무를 고른다
-›
-🔍
-2
-특약검색기
-그 상품의 특약·보장범위·사각지대 확인
-›
-🧮
-3
-보상시뮬레이터
-치료 여정별 보장·공백을 진단
-›
-💊
-4
-통합치료비 시뮬
-치료비 특약을 얼마로 설계할지 숫자로
-›
-✨
-5
-MeAI 프롬프트
-보장분석·리모델링 제안을 완성
-결과 : 신인도 베테랑과 같은 정보로, 같은 수준의 보장분석·리모델링 제안을 할 수 있습니다.도구 간 결과가 서로의 입력값이 되므로 개별 도구의 합보다 큰 효과가 발생하고, MeAI 활용 환경이 자연스럽게 구축됩니다. 명패 제작기는 교육·행사 운영 공수를 줄여 조직관리 시간을 되돌려 줍니다.
-🪧
-명패 제작기 — 조직 운영 도구
-위촉·환영식 · 집합교육 · 시상 — 엑셀 한 장으로 즉시
-🏠
-대문 하나 — URL 하나
-카드 6개 · 걱정인형 6종 · 각 도구에서 🏠 대문으로 복귀
-메리츠화재 · 세일즈혁신TF
-18</a:t>
+              <a:t/>
             </a:r>
             <a:endParaRPr lang="en-US" dirty="0"/>
           </a:p>
@@ -1619,12 +1411,7 @@
           <a:p>
             <a:r>
               <a:rPr lang="en-US" dirty="0"/>
-              <a:t>03
-SECTION 03
-데이터 신뢰성과 현장 반응
-약관 원문 대조 951건 · 분류표 216개 · 86일 누적 사용 20,181회 (실시간 통계 기준)
-메리츠화재 · 세일즈혁신TF
-19</a:t>
+              <a:t/>
             </a:r>
             <a:endParaRPr lang="en-US" dirty="0"/>
           </a:p>
@@ -1712,22 +1499,7 @@
           <a:p>
             <a:r>
               <a:rPr lang="en-US" dirty="0"/>
-              <a:t>AGENDA
-보고 순서
-01
-개발 배경과 목적
-현장의 벽 · 개발 방식 · 0원 운영
-02
-영업지원 도구 6종
-특약검색기 · 보상시뮬레이터 · 상품 라인업 · 프롬프트 · 명패 · 통합치료비 시뮬레이션(신규)
-03
-데이터 신뢰성과 현장 반응
-약관 원문 대조 951건 · 분류표 216개 · 86일 누적 20,181회 사용
-04
-기대효과와 로드맵
-업무효율 · 매출증진 · 신담보 전파 · 민원 리스크 · TA 4대 목표 기여
-메리츠화재 · 세일즈혁신TF
-02</a:t>
+              <a:t/>
             </a:r>
             <a:endParaRPr lang="en-US" dirty="0"/>
           </a:p>
@@ -1815,38 +1587,7 @@
           <a:p>
             <a:r>
               <a:rPr lang="en-US" dirty="0"/>
-              <a:t>03 · 데이터 신뢰성
-약관 원문 대조로 검증한 951건 · 분류표 216개
-951건
-약관 정본 대조 검증
-통합간편·케어프리·운전자·치아 4종 약관
-216개
-분류표(별표) 전수 연결
-미연결·유령 참조 0건
-935건
-본문이 문장으로 끝남
-잘림 복구 909건 (42 → 935)
-87건
-질병코드 매핑 정정
-C64 신장암 누락 등 수정
-📄
-약관 PDF 정본 대조
-통합간편 2607 · 케어프리 M-Basket 2607 · 운전자 2608 · 치아 2601 원문과 1:1 검증
-✂️
-조판 잘림 복원
-특약 제목 위치 기준으로 다음 특약까지 재추출 → 909건의 준용규정 잘림 복구, 페이지 번호 97건 보정
-🧬
-오수집 코드 정정
-통합암 분류표의 C64(신장암) 누락, 제자리암 D00~D09 누락, 제외코드 오등록 등 87건 정정
-🔁
-재실행 가능한 복구 스크립트
-다음 판 약관이 나오면 PDF만 올리고 스크립트를 돌려 같은 방식으로 갱신
-🧪
-기능이 곧 점검 도구
-부분보장·상위호환·시뮬레이션 로직이 데이터 오류를 역검출
-도구의 신뢰도는 데이터 정합성에서 나옵니다 — 통합치료비 금액표 12종도 약관 지급금액표(가입금액별)를 그대로 옮겼습니다.
-메리츠화재 · 세일즈혁신TF
-20</a:t>
+              <a:t/>
             </a:r>
             <a:endParaRPr lang="en-US" dirty="0"/>
           </a:p>
@@ -1934,25 +1675,7 @@
           <a:p>
             <a:r>
               <a:rPr lang="en-US" dirty="0"/>
-              <a:t>03 · 현장 반응
-공식 배포 전, 영업가족이 2만 번 넘게 찾았습니다
-20,181회
-공식 배포·교육 없이 입소문만으로 — 86일 동안 쌓인 누적 사용(조회) 횟수 · 실시간 통계 대시보드 집계
-검색 통계는 대문의 모든 도구를 한곳에 모아 익명으로 집계합니다. 로그인·개인정보 없이 조회·검색·상세조회 건수만 기록합니다.
-11,362회
-검색 횟수
-질병 · 특약 검색
-4,474회
-특약 상세조회
-특약 클릭 → 약관 본문
-86일
-활동 일수
-로그가 쌓인 날 · 거의 매일
-0건
-개인정보 수집
-로그인 없이 익명 집계만
-메리츠화재 · 세일즈혁신TF
-21</a:t>
+              <a:t/>
             </a:r>
             <a:endParaRPr lang="en-US" dirty="0"/>
           </a:p>
@@ -2040,63 +1763,7 @@
           <a:p>
             <a:r>
               <a:rPr lang="en-US" dirty="0"/>
-              <a:t>03 · 현장 반응
-현장이 가장 많이 찾는 특약과 질병 — 통계가 다음 도구를 가리켰습니다
-🏆 인기 특약 TOP 8
-가장 많이 상세 조회된 특약 (연간)
-1
-특정순환계질환 통합치료비
-413
-2
-상해 통합치료비(실속형)
-282
-3
-암 통합치료비(기본형)
-203
-4
-특정순환계질환(주요손상및질환) 통합치료비
-162
-5
-암 통합치료 생활비(연간 2회이상)
-129
-6
-130대질병수술비
-87
-7
-상급종합병원·권역센터 특정순환계질환 통합치료비
-74
-8
-암전후관련 특정질환 및 양성신생물 통합치료비
-73
-🦠 인기 질병 TOP 8
-가장 많이 검색된 질병군 (연간)
-1
-소화기암(위·대장 등)
-1,262
-2
-양성종양
-721
-3
-기타 뇌혈관질환
-541
-4
-유방암
-505
-5
-뇌출혈
-427
-6
-전이암·부위불명암
-367
-7
-항문·직장질환(치질 등)
-355
-8
-백내장
-354
-분홍 글씨 = 통합치료비 계열. TOP 8 중 7개가 통합치료비 특약 — 현장이 가장 어려워하고 가장 많이 찾는 특약이기에 6번째 도구 「통합치료비 시뮬레이션」을 만들었습니다.
-메리츠화재 · 세일즈혁신TF
-22</a:t>
+              <a:t/>
             </a:r>
             <a:endParaRPr lang="en-US" dirty="0"/>
           </a:p>
@@ -2184,12 +1851,7 @@
           <a:p>
             <a:r>
               <a:rPr lang="en-US" dirty="0"/>
-              <a:t>04
-SECTION 04
-기대효과와 로드맵
-여섯 개 도구가 만들어내는 정량·정성 효과
-메리츠화재 · 세일즈혁신TF
-23</a:t>
+              <a:t/>
             </a:r>
             <a:endParaRPr lang="en-US" dirty="0"/>
           </a:p>
@@ -2277,16 +1939,7 @@
           <a:p>
             <a:r>
               <a:rPr lang="en-US" dirty="0"/>
-              <a:t>VALUE 01 · 업무효율
-시간을 되돌려 드립니다
-절감액 = 상담건수 × 절감시간 × 인원 × 인건비 × 12
-연 2.63억
-원 상당의 업무시간 절감 추정 (연간 약 20.8만 시간)
-절감 시간은 곧 상담 활동 시간입니다. 영업가족뿐 아니라 매니저·본부장의 확인·검수 시간도 함께 줄어들며, 통합치료비처럼 계산이 복잡한 특약일수록 절감 폭이 큽니다.
-가정
-•  1인 월 상담 3건•  건당 확인 10분 → 30초 (9.5분↓)•  사용 3,667명 (TA채널 월 활동 기준)•  시간당 인건비 1.25만원•  12개월 반복
-메리츠화재 · 세일즈혁신TF
-24</a:t>
+              <a:t/>
             </a:r>
             <a:endParaRPr lang="en-US" dirty="0"/>
           </a:p>
@@ -2374,16 +2027,7 @@
           <a:p>
             <a:r>
               <a:rPr lang="en-US" dirty="0"/>
-              <a:t>VALUE 02 · 매출증진
-즉답이 곧 계약체결로
-매출 = 상담 × 체결률 개선 × 초회보험료 × 유지율 + 업셀링
-연 2.28억
-원 상당의 매출 증진 추정 (신규 1.5억 + 업셀링 0.78억)
-정확하고 즉각적인 설명 → 고객 신뢰 → 클로징. 상위호환 특약 제안과 통합치료비 가입금액 비교 화면은 신담보·증액 제안(업셀링)의 접점이 됩니다.
-가정
-•  체결률 개선 1%p•  평균 초회보험료 5만원•  유지율 보정 85%•  업셀링 적용률 10%•  객단가 증가 3만원
-메리츠화재 · 세일즈혁신TF
-25</a:t>
+              <a:t/>
             </a:r>
             <a:endParaRPr lang="en-US" dirty="0"/>
           </a:p>
@@ -2471,21 +2115,7 @@
           <a:p>
             <a:r>
               <a:rPr lang="en-US" dirty="0"/>
-              <a:t>VALUE 03 · 04
-신담보 전파 절감  +  민원 리스크 감소
-03
-신담보 전파·교육 절감
-연 1억원
-집합교육 시간 대체 + 인쇄·배포비 절감 + 출시 리드타임 단축으로 발생한 추가 판매액
-▪ 당일 반영 → 초기 판매 골든타임 확보▪ 약관 개정판도 스크립트로 즉시 갱신
-04
-오안내·민원 리스크 감소
-연 1억원
-오안내 감소 × 건당 처리시간 × 인건비 + 품질지표 패널티·환급비 감소분
-▪ 연 약 1천 건 오안내 예방 가정▪ 약관 원문·지급금액표 기반 설명으로 분쟁 소지 축소
-전파 절감은 매 개정판마다, 민원 감소는 매 상담마다 — 두 효과 모두 반복적으로 누적됩니다.
-메리츠화재 · 세일즈혁신TF
-26</a:t>
+              <a:t/>
             </a:r>
             <a:endParaRPr lang="en-US" dirty="0"/>
           </a:p>
@@ -2573,14 +2203,7 @@
           <a:p>
             <a:r>
               <a:rPr lang="en-US" dirty="0"/>
-              <a:t>TOTAL · 연간 기대효과
-한 번 구축된 도구는 감가 없이 매년 반복됩니다
-연간 기대효과 합계
-약 6.91억원
-/ 년 · 월 TA채널 영업가족 3,667명 사용 가정
-6번째 도구(통합치료비 시뮬레이션)의 효과는 보수적으로 산입하지 않았습니다. 통합치료비 계열 44개 특약의 설명 시간 절감과 증액 제안 효과는 추가 상방입니다.
-메리츠화재 · 세일즈혁신TF
-27</a:t>
+              <a:t/>
             </a:r>
             <a:endParaRPr lang="en-US" dirty="0"/>
           </a:p>
@@ -2668,52 +2291,7 @@
           <a:p>
             <a:r>
               <a:rPr lang="en-US" dirty="0"/>
-              <a:t>INTEGRATION
-TA 4대 목표별 기여도 · 향후 로드맵
-경쟁력·생산성
-영업관리력
-신입 도입·정착
-완전판매·리스크
-특약검색기
-●
-●
-○
-○
-보상시뮬레이터
-●
-○
-●
-○
-상품 라인업
-○
-●
-●
-●
-프롬프트
-●
-●
-○
-○
-명패 제작기
-○
-●
-○
-○
-통합치료비 시뮬
-●
-○
-●
-●
-●  직접 기여      ○  간접 기여
-향후 로드맵
-단기
-신담보 즉시 반영 · 사용 로그 기반 UI 개선 · 통합치료비 시나리오 확장
-중기
-MeAI 연동 강화 · 보장 공백 진단 확장 · 경쟁사 비교
-장기
-사내 정식 시스템 이관 · 전 채널 표준 도구화
-메리츠화재 · 세일즈혁신TF
-28</a:t>
+              <a:t/>
             </a:r>
             <a:endParaRPr lang="en-US" dirty="0"/>
           </a:p>
@@ -2801,11 +2379,7 @@
           <a:p>
             <a:r>
               <a:rPr lang="en-US" dirty="0"/>
-              <a:t>현장이 필요로 한 도구를,
-현장을 아는 사람이 만들었습니다.
-대문 · 특약검색기 · 보상시뮬레이터 · 상품 라인업 · 프롬프트 라이브러리 · 명패 제작기 · 통합치료비 시뮬레이션
-hunx11-sys.github.io/MeAI
-세일즈혁신TF  이헌수</a:t>
+              <a:t/>
             </a:r>
             <a:endParaRPr lang="en-US" dirty="0"/>
           </a:p>
@@ -2893,12 +2467,7 @@
           <a:p>
             <a:r>
               <a:rPr lang="en-US" dirty="0"/>
-              <a:t>01
-SECTION 01
-개발 배경과 목적
-왜 만들었고, 어떻게 만들었는가
-메리츠화재 · 세일즈혁신TF
-03</a:t>
+              <a:t/>
             </a:r>
             <a:endParaRPr lang="en-US" dirty="0"/>
           </a:p>
@@ -2940,6 +2509,94 @@
 </p:notes>
 </file>
 
+<file path=ppt/notesSlides/notesSlide30.xml><?xml version="1.0" encoding="utf-8"?>
+<p:notes xmlns:a="http://schemas.openxmlformats.org/drawingml/2006/main" xmlns:r="http://schemas.openxmlformats.org/officeDocument/2006/relationships" xmlns:p="http://schemas.openxmlformats.org/presentationml/2006/main">
+  <p:cSld>
+    <p:spTree>
+      <p:nvGrpSpPr>
+        <p:cNvPr id="1" name=""/>
+        <p:cNvGrpSpPr/>
+        <p:nvPr/>
+      </p:nvGrpSpPr>
+      <p:grpSpPr>
+        <a:xfrm>
+          <a:off x="0" y="0"/>
+          <a:ext cx="0" cy="0"/>
+          <a:chOff x="0" y="0"/>
+          <a:chExt cx="0" cy="0"/>
+        </a:xfrm>
+      </p:grpSpPr>
+      <p:sp>
+        <p:nvSpPr>
+          <p:cNvPr id="2" name="Slide Image Placeholder 1"/>
+          <p:cNvSpPr>
+            <a:spLocks noGrp="1" noRot="1" noChangeAspect="1"/>
+          </p:cNvSpPr>
+          <p:nvPr>
+            <p:ph type="sldImg"/>
+          </p:nvPr>
+        </p:nvSpPr>
+        <p:spPr/>
+      </p:sp>
+      <p:sp>
+        <p:nvSpPr>
+          <p:cNvPr id="3" name="Notes Placeholder 2"/>
+          <p:cNvSpPr>
+            <a:spLocks noGrp="1"/>
+          </p:cNvSpPr>
+          <p:nvPr>
+            <p:ph type="body" idx="1"/>
+          </p:nvPr>
+        </p:nvSpPr>
+        <p:spPr/>
+        <p:txBody>
+          <a:bodyPr/>
+          <a:lstStyle/>
+          <a:p>
+            <a:r>
+              <a:rPr lang="en-US" dirty="0"/>
+              <a:t/>
+            </a:r>
+            <a:endParaRPr lang="en-US" dirty="0"/>
+          </a:p>
+        </p:txBody>
+      </p:sp>
+      <p:sp>
+        <p:nvSpPr>
+          <p:cNvPr id="4" name="Slide Number Placeholder 3"/>
+          <p:cNvSpPr>
+            <a:spLocks noGrp="1"/>
+          </p:cNvSpPr>
+          <p:nvPr>
+            <p:ph type="sldNum" sz="quarter" idx="10"/>
+          </p:nvPr>
+        </p:nvSpPr>
+        <p:spPr/>
+        <p:txBody>
+          <a:bodyPr/>
+          <a:lstStyle/>
+          <a:p>
+            <a:fld id="{F7021451-1387-4CA6-816F-3879F97B5CBC}" type="slidenum">
+              <a:rPr lang="en-US"/>
+              <a:t>30</a:t>
+            </a:fld>
+            <a:endParaRPr lang="en-US"/>
+          </a:p>
+        </p:txBody>
+      </p:sp>
+    </p:spTree>
+    <p:extLst>
+      <p:ext uri="{BB962C8B-B14F-4D97-AF65-F5344CB8AC3E}">
+        <p14:creationId xmlns:p14="http://schemas.microsoft.com/office/powerpoint/2010/main" val="1024086991"/>
+      </p:ext>
+    </p:extLst>
+  </p:cSld>
+  <p:clrMapOvr>
+    <a:masterClrMapping/>
+  </p:clrMapOvr>
+</p:notes>
+</file>
+
 <file path=ppt/notesSlides/notesSlide4.xml><?xml version="1.0" encoding="utf-8"?>
 <p:notes xmlns:a="http://schemas.openxmlformats.org/drawingml/2006/main" xmlns:r="http://schemas.openxmlformats.org/officeDocument/2006/relationships" xmlns:p="http://schemas.openxmlformats.org/presentationml/2006/main">
   <p:cSld>
@@ -2986,31 +2643,7 @@
           <a:p>
             <a:r>
               <a:rPr lang="en-US" dirty="0"/>
-              <a:t>01 · 개발 배경
-책상이 아니라, 현장에서 시작했습니다
-🌱
-1
-순수신인 FP
-아무것도 모르는 상태에서 상품·특약·약관을 처음부터
-›
-🤝
-2
-영업가족 활동
-고객 앞에서 막히던 순간들, 찾을 수 없던 특약과 보상 근거
-›
-🎓
-3
-조직관리·매니저
-신입 교육·정착의 벽, 반복되는 같은 질문과 교육 공수
-›
-🛠️
-4
-세일즈혁신TF
-그때 필요했던 도구를, 지금 직접 만들다
-“
-영업가족이 실제로 막히는 지점은 상품설명서 안에 있지 않았습니다.고객 앞에서 즉시 꺼내 쓸 수 있는 ‘검색 가능한 도구’가 없었을 뿐입니다.— 순수신인부터 매니저까지 경험한 사람이, 그때 필요했던 것을 만들었습니다.
-메리츠화재 · 세일즈혁신TF
-04</a:t>
+              <a:t/>
             </a:r>
             <a:endParaRPr lang="en-US" dirty="0"/>
           </a:p>
@@ -3098,31 +2731,7 @@
           <a:p>
             <a:r>
               <a:rPr lang="en-US" dirty="0"/>
-              <a:t>01 · 개발 배경
-현장이 반복해서 부딪히는 다섯 가지 벽
-🔍
-1
-특약을 찾을 수가 없다
-951개 특별약관·매월 바뀌는 신담보. 약관 PDF를 뒤지는 데만 수십 분.
-🧬
-2
-질병코드와 보상 구조가 어렵다
-KCD 코드는 낯설고, 어떤 특약이 언제 얼마를 주는지 설명하기 어렵다.
-💊
-3
-통합치료비는 더 어렵다
-12종 특약·항목별 금액표·연 1회 한도. “위암이면 얼마 나와요?”에 즉답이 안 된다.
-🤖
-4
-AI를 써도 무엇을 물을지 모른다
-MeAI가 있어도 프롬프트를 모르면 보장분석·리모델링까지 가지 못한다.
-📦
-5
-상품 자체가 생소하다
-순수·경력신인 모두 라인업·알릴의무·납입면제 학습에 기회비용이 크다.
-→  다섯 개의 벽에 각각 대응하는 여섯 개의 도구로 답했습니다.
-메리츠화재 · 세일즈혁신TF
-05</a:t>
+              <a:t/>
             </a:r>
             <a:endParaRPr lang="en-US" dirty="0"/>
           </a:p>
@@ -3210,38 +2819,7 @@
           <a:p>
             <a:r>
               <a:rPr lang="en-US" dirty="0"/>
-              <a:t>01 · 개발 방식
-사내 인력 1인 개발 · 추가 비용 0원
-0원
-개발 · 라이선스 · 서버 비용
-GitHub Pages 무료 호스팅
-1인
-기획 · 데이터 · 개발 · 운영
-세일즈혁신TF 자체 수행
-즉시
-오류 수정 · 신담보 반영
-외부 개발사 의존 없음
-🌐
-배포
-GitHub Pages · URL 공유만으로 전사 확산
-🔒
-개인정보 0
-고객 실데이터 미사용 · 미저장 · 서버 전송 없음
-📱
-설치 불필요
-URL 하나로 PC·모바일 즉시 실행
-📄
-약관 원문 기준
-교육자료가 아닌 약관 PDF를 정본으로 검증
-🔁
-갱신
-신담보·신상품 출시 시 데이터만 교체 · 재추출 스크립트 내장
-🧱
-자체완결 HTML
-외부 서버 없이 단일 파일로 동작 · 폐쇄망 대응(명패 제작기)
-※ 사내 예산 집행 없이 구축·운영 중 — 외부 위탁 시 요구되는 요건정의·계약·검수 리드타임도 발생하지 않습니다.
-메리츠화재 · 세일즈혁신TF
-06</a:t>
+              <a:t/>
             </a:r>
             <a:endParaRPr lang="en-US" dirty="0"/>
           </a:p>
@@ -3329,12 +2907,7 @@
           <a:p>
             <a:r>
               <a:rPr lang="en-US" dirty="0"/>
-              <a:t>02
-SECTION 02
-영업지원 도구 6종
-특약검색기 · 보상시뮬레이터 · 상품 라인업 · 프롬프트 · 명패 제작기 · 통합치료비 시뮬레이션
-메리츠화재 · 세일즈혁신TF
-07</a:t>
+              <a:t/>
             </a:r>
             <a:endParaRPr lang="en-US" dirty="0"/>
           </a:p>
@@ -3422,37 +2995,7 @@
           <a:p>
             <a:r>
               <a:rPr lang="en-US" dirty="0"/>
-              <a:t>02 · 서비스 구성
-대문 하나 + 영업지원 도구 6개
-hunx11-sys.github.io/MeAI · 단일 URL 진입점 · 걱정인형 6종이 M·E·R·I·T·Z 를 상징
-🔍
-특약검색기
-특약 951건을 질병코드·질병명·특약명으로 검색하고 약관 본문·분류표·보장 분석까지
-/tool.html
-🧮
-보상시뮬레이터
-질병·사고를 입력하면 진단→검사→수술→입원→치료 순서로 반응하는 특약을 전수 추출
-/tool.html#sim
-📦
-상품 라인업
-장기상품 50종을 상품구분·심사유형으로 좁히고 알릴의무 표·납입면제·특징을 한 화면에서
-/products.html
-✨
-프롬프트 라이브러리
-MeAI에 바로 쓰는 검증 프롬프트 270개를 대주제·영업단계·소주제로 골라 원클릭 복사
-/prompts.html
-🪧
-명패 제작기
-엑셀 명단 한 장으로 행사·교육·시상용 명패와 폼텍 라벨을 즉시 생성해 A4로 인쇄
-/명패생성기.html
-💊
-통합치료비 시뮬레이션
-질병을 고르면 암·뇌·심장 통합치료비 특약 12종이 치료 단계별로 얼마를 지급하는지 계산
-/통합치료비.html
-NEW
-URL 하나만 공유하면 됩니다. 설치·로그인 없이 즉시 실행되며, 「통합치료비 시뮬레이션」이 6번째 도구로 추가되었습니다.
-메리츠화재 · 세일즈혁신TF
-08</a:t>
+              <a:t/>
             </a:r>
             <a:endParaRPr lang="en-US" dirty="0"/>
           </a:p>
@@ -3540,27 +3083,7 @@
           <a:p>
             <a:r>
               <a:rPr lang="en-US" dirty="0"/>
-              <a:t>TOOL 01
-특약검색기
-세 가지 방식으로 동시에 검색 — 질병코드 · 질병명 · 특약명
-‘갑상선암’만 입력해도 특약과 질병이 실시간 자동완성으로 뜹니다. 상품(통합간편·케어프리·운전자·치아)과 분류(암 진단·뇌혈관·치아 등)로 즉시 좁힐 수 있습니다.
-🔤
-질병코드 · 질병명 · 특약명 검색
-C73 · 갑상선암 · 암진단비 — 어느 쪽으로 쳐도 같은 결과
-⚡
-실시간 자동완성 · 결과 건수
-입력 즉시 특약/질병 후보를 배지로 구분해 제시
-🗂️
-상품 · 분류 필터 · 계열 묶기
-통합치료비 44 · 암 진단 51 · 뇌혈관 51 … 분류별 건수 표시
-⭐
-즐겨찾기 · 최근 본 · 특약비교
-자주 쓰는 특약 저장, 여러 특약을 나란히 비교
-🛡️
-오매칭 방지
-‘치매’ 검색 시 ‘치매제외’ 특약은 자동 배제
-메리츠화재 · 세일즈혁신TF
-09</a:t>
+              <a:t/>
             </a:r>
             <a:endParaRPr lang="en-US" dirty="0"/>
           </a:p>
@@ -3928,7 +3451,7 @@
       </p:grpSpPr>
       <p:pic>
         <p:nvPicPr>
-          <p:cNvPr id="2" name="Image 0" descr="/tmp/claude-0/-home-user-MeAI/ecc740f6-0919-5f47-9404-106c0d41147b/scratchpad/deck/img_deckA/01.jpg">    </p:cNvPr>
+          <p:cNvPr id="2" name="Image 0" descr="/tmp/claude-0/-home-user-MeAI/7f4a7ba7-8b20-5496-b90b-7aeb2e1d1d67/scratchpad/ppt/final/c/01.jpg">    </p:cNvPr>
           <p:cNvPicPr>
             <a:picLocks noChangeAspect="1"/>
           </p:cNvPicPr>
@@ -3977,7 +3500,7 @@
       </p:grpSpPr>
       <p:pic>
         <p:nvPicPr>
-          <p:cNvPr id="2" name="Image 0" descr="/tmp/claude-0/-home-user-MeAI/ecc740f6-0919-5f47-9404-106c0d41147b/scratchpad/deck/img_deckA/10.jpg">    </p:cNvPr>
+          <p:cNvPr id="2" name="Image 0" descr="/tmp/claude-0/-home-user-MeAI/7f4a7ba7-8b20-5496-b90b-7aeb2e1d1d67/scratchpad/ppt/final/c/10.jpg">    </p:cNvPr>
           <p:cNvPicPr>
             <a:picLocks noChangeAspect="1"/>
           </p:cNvPicPr>
@@ -4026,7 +3549,7 @@
       </p:grpSpPr>
       <p:pic>
         <p:nvPicPr>
-          <p:cNvPr id="2" name="Image 0" descr="/tmp/claude-0/-home-user-MeAI/ecc740f6-0919-5f47-9404-106c0d41147b/scratchpad/deck/img_deckA/11.jpg">    </p:cNvPr>
+          <p:cNvPr id="2" name="Image 0" descr="/tmp/claude-0/-home-user-MeAI/7f4a7ba7-8b20-5496-b90b-7aeb2e1d1d67/scratchpad/ppt/final/c/11.jpg">    </p:cNvPr>
           <p:cNvPicPr>
             <a:picLocks noChangeAspect="1"/>
           </p:cNvPicPr>
@@ -4075,7 +3598,7 @@
       </p:grpSpPr>
       <p:pic>
         <p:nvPicPr>
-          <p:cNvPr id="2" name="Image 0" descr="/tmp/claude-0/-home-user-MeAI/ecc740f6-0919-5f47-9404-106c0d41147b/scratchpad/deck/img_deckA/12.jpg">    </p:cNvPr>
+          <p:cNvPr id="2" name="Image 0" descr="/tmp/claude-0/-home-user-MeAI/7f4a7ba7-8b20-5496-b90b-7aeb2e1d1d67/scratchpad/ppt/final/c/12.jpg">    </p:cNvPr>
           <p:cNvPicPr>
             <a:picLocks noChangeAspect="1"/>
           </p:cNvPicPr>
@@ -4124,7 +3647,7 @@
       </p:grpSpPr>
       <p:pic>
         <p:nvPicPr>
-          <p:cNvPr id="2" name="Image 0" descr="/tmp/claude-0/-home-user-MeAI/ecc740f6-0919-5f47-9404-106c0d41147b/scratchpad/deck/img_deckA/13.jpg">    </p:cNvPr>
+          <p:cNvPr id="2" name="Image 0" descr="/tmp/claude-0/-home-user-MeAI/7f4a7ba7-8b20-5496-b90b-7aeb2e1d1d67/scratchpad/ppt/final/c/13.jpg">    </p:cNvPr>
           <p:cNvPicPr>
             <a:picLocks noChangeAspect="1"/>
           </p:cNvPicPr>
@@ -4173,7 +3696,7 @@
       </p:grpSpPr>
       <p:pic>
         <p:nvPicPr>
-          <p:cNvPr id="2" name="Image 0" descr="/tmp/claude-0/-home-user-MeAI/ecc740f6-0919-5f47-9404-106c0d41147b/scratchpad/deck/img_deckA/14.jpg">    </p:cNvPr>
+          <p:cNvPr id="2" name="Image 0" descr="/tmp/claude-0/-home-user-MeAI/7f4a7ba7-8b20-5496-b90b-7aeb2e1d1d67/scratchpad/ppt/final/c/14.jpg">    </p:cNvPr>
           <p:cNvPicPr>
             <a:picLocks noChangeAspect="1"/>
           </p:cNvPicPr>
@@ -4222,7 +3745,7 @@
       </p:grpSpPr>
       <p:pic>
         <p:nvPicPr>
-          <p:cNvPr id="2" name="Image 0" descr="/tmp/claude-0/-home-user-MeAI/ecc740f6-0919-5f47-9404-106c0d41147b/scratchpad/deck/img_deckA/15.jpg">    </p:cNvPr>
+          <p:cNvPr id="2" name="Image 0" descr="/tmp/claude-0/-home-user-MeAI/7f4a7ba7-8b20-5496-b90b-7aeb2e1d1d67/scratchpad/ppt/final/c/15.jpg">    </p:cNvPr>
           <p:cNvPicPr>
             <a:picLocks noChangeAspect="1"/>
           </p:cNvPicPr>
@@ -4271,7 +3794,7 @@
       </p:grpSpPr>
       <p:pic>
         <p:nvPicPr>
-          <p:cNvPr id="2" name="Image 0" descr="/tmp/claude-0/-home-user-MeAI/ecc740f6-0919-5f47-9404-106c0d41147b/scratchpad/deck/img_deckA/16.jpg">    </p:cNvPr>
+          <p:cNvPr id="2" name="Image 0" descr="/tmp/claude-0/-home-user-MeAI/7f4a7ba7-8b20-5496-b90b-7aeb2e1d1d67/scratchpad/ppt/final/c/16.jpg">    </p:cNvPr>
           <p:cNvPicPr>
             <a:picLocks noChangeAspect="1"/>
           </p:cNvPicPr>
@@ -4320,7 +3843,7 @@
       </p:grpSpPr>
       <p:pic>
         <p:nvPicPr>
-          <p:cNvPr id="2" name="Image 0" descr="/tmp/claude-0/-home-user-MeAI/ecc740f6-0919-5f47-9404-106c0d41147b/scratchpad/deck/img_deckA/17.jpg">    </p:cNvPr>
+          <p:cNvPr id="2" name="Image 0" descr="/tmp/claude-0/-home-user-MeAI/7f4a7ba7-8b20-5496-b90b-7aeb2e1d1d67/scratchpad/ppt/final/c/17.jpg">    </p:cNvPr>
           <p:cNvPicPr>
             <a:picLocks noChangeAspect="1"/>
           </p:cNvPicPr>
@@ -4369,7 +3892,7 @@
       </p:grpSpPr>
       <p:pic>
         <p:nvPicPr>
-          <p:cNvPr id="2" name="Image 0" descr="/tmp/claude-0/-home-user-MeAI/ecc740f6-0919-5f47-9404-106c0d41147b/scratchpad/deck/img_deckA/18.jpg">    </p:cNvPr>
+          <p:cNvPr id="2" name="Image 0" descr="/tmp/claude-0/-home-user-MeAI/7f4a7ba7-8b20-5496-b90b-7aeb2e1d1d67/scratchpad/ppt/final/c/18.jpg">    </p:cNvPr>
           <p:cNvPicPr>
             <a:picLocks noChangeAspect="1"/>
           </p:cNvPicPr>
@@ -4418,7 +3941,7 @@
       </p:grpSpPr>
       <p:pic>
         <p:nvPicPr>
-          <p:cNvPr id="2" name="Image 0" descr="/tmp/claude-0/-home-user-MeAI/ecc740f6-0919-5f47-9404-106c0d41147b/scratchpad/deck/img_deckA/19.jpg">    </p:cNvPr>
+          <p:cNvPr id="2" name="Image 0" descr="/tmp/claude-0/-home-user-MeAI/7f4a7ba7-8b20-5496-b90b-7aeb2e1d1d67/scratchpad/ppt/final/c/19.jpg">    </p:cNvPr>
           <p:cNvPicPr>
             <a:picLocks noChangeAspect="1"/>
           </p:cNvPicPr>
@@ -4467,7 +3990,7 @@
       </p:grpSpPr>
       <p:pic>
         <p:nvPicPr>
-          <p:cNvPr id="2" name="Image 0" descr="/tmp/claude-0/-home-user-MeAI/ecc740f6-0919-5f47-9404-106c0d41147b/scratchpad/deck/img_deckA/02.jpg">    </p:cNvPr>
+          <p:cNvPr id="2" name="Image 0" descr="/tmp/claude-0/-home-user-MeAI/7f4a7ba7-8b20-5496-b90b-7aeb2e1d1d67/scratchpad/ppt/final/c/02.jpg">    </p:cNvPr>
           <p:cNvPicPr>
             <a:picLocks noChangeAspect="1"/>
           </p:cNvPicPr>
@@ -4516,7 +4039,7 @@
       </p:grpSpPr>
       <p:pic>
         <p:nvPicPr>
-          <p:cNvPr id="2" name="Image 0" descr="/tmp/claude-0/-home-user-MeAI/ecc740f6-0919-5f47-9404-106c0d41147b/scratchpad/deck/img_deckA/20.jpg">    </p:cNvPr>
+          <p:cNvPr id="2" name="Image 0" descr="/tmp/claude-0/-home-user-MeAI/7f4a7ba7-8b20-5496-b90b-7aeb2e1d1d67/scratchpad/ppt/final/c/20.jpg">    </p:cNvPr>
           <p:cNvPicPr>
             <a:picLocks noChangeAspect="1"/>
           </p:cNvPicPr>
@@ -4565,7 +4088,7 @@
       </p:grpSpPr>
       <p:pic>
         <p:nvPicPr>
-          <p:cNvPr id="2" name="Image 0" descr="/tmp/claude-0/-home-user-MeAI/ecc740f6-0919-5f47-9404-106c0d41147b/scratchpad/deck/img_deckA/21.jpg">    </p:cNvPr>
+          <p:cNvPr id="2" name="Image 0" descr="/tmp/claude-0/-home-user-MeAI/7f4a7ba7-8b20-5496-b90b-7aeb2e1d1d67/scratchpad/ppt/final/c/21.jpg">    </p:cNvPr>
           <p:cNvPicPr>
             <a:picLocks noChangeAspect="1"/>
           </p:cNvPicPr>
@@ -4614,7 +4137,7 @@
       </p:grpSpPr>
       <p:pic>
         <p:nvPicPr>
-          <p:cNvPr id="2" name="Image 0" descr="/tmp/claude-0/-home-user-MeAI/ecc740f6-0919-5f47-9404-106c0d41147b/scratchpad/deck/img_deckA/22.jpg">    </p:cNvPr>
+          <p:cNvPr id="2" name="Image 0" descr="/tmp/claude-0/-home-user-MeAI/7f4a7ba7-8b20-5496-b90b-7aeb2e1d1d67/scratchpad/ppt/final/c/22.jpg">    </p:cNvPr>
           <p:cNvPicPr>
             <a:picLocks noChangeAspect="1"/>
           </p:cNvPicPr>
@@ -4663,7 +4186,7 @@
       </p:grpSpPr>
       <p:pic>
         <p:nvPicPr>
-          <p:cNvPr id="2" name="Image 0" descr="/tmp/claude-0/-home-user-MeAI/ecc740f6-0919-5f47-9404-106c0d41147b/scratchpad/deck/img_deckA/23.jpg">    </p:cNvPr>
+          <p:cNvPr id="2" name="Image 0" descr="/tmp/claude-0/-home-user-MeAI/7f4a7ba7-8b20-5496-b90b-7aeb2e1d1d67/scratchpad/ppt/final/c/23.jpg">    </p:cNvPr>
           <p:cNvPicPr>
             <a:picLocks noChangeAspect="1"/>
           </p:cNvPicPr>
@@ -4712,7 +4235,7 @@
       </p:grpSpPr>
       <p:pic>
         <p:nvPicPr>
-          <p:cNvPr id="2" name="Image 0" descr="/tmp/claude-0/-home-user-MeAI/ecc740f6-0919-5f47-9404-106c0d41147b/scratchpad/deck/img_deckA/24.jpg">    </p:cNvPr>
+          <p:cNvPr id="2" name="Image 0" descr="/tmp/claude-0/-home-user-MeAI/7f4a7ba7-8b20-5496-b90b-7aeb2e1d1d67/scratchpad/ppt/final/c/24.jpg">    </p:cNvPr>
           <p:cNvPicPr>
             <a:picLocks noChangeAspect="1"/>
           </p:cNvPicPr>
@@ -4761,7 +4284,7 @@
       </p:grpSpPr>
       <p:pic>
         <p:nvPicPr>
-          <p:cNvPr id="2" name="Image 0" descr="/tmp/claude-0/-home-user-MeAI/ecc740f6-0919-5f47-9404-106c0d41147b/scratchpad/deck/img_deckA/25.jpg">    </p:cNvPr>
+          <p:cNvPr id="2" name="Image 0" descr="/tmp/claude-0/-home-user-MeAI/7f4a7ba7-8b20-5496-b90b-7aeb2e1d1d67/scratchpad/ppt/final/c/25.jpg">    </p:cNvPr>
           <p:cNvPicPr>
             <a:picLocks noChangeAspect="1"/>
           </p:cNvPicPr>
@@ -4810,7 +4333,7 @@
       </p:grpSpPr>
       <p:pic>
         <p:nvPicPr>
-          <p:cNvPr id="2" name="Image 0" descr="/tmp/claude-0/-home-user-MeAI/ecc740f6-0919-5f47-9404-106c0d41147b/scratchpad/deck/img_deckA/26.jpg">    </p:cNvPr>
+          <p:cNvPr id="2" name="Image 0" descr="/tmp/claude-0/-home-user-MeAI/7f4a7ba7-8b20-5496-b90b-7aeb2e1d1d67/scratchpad/ppt/final/c/26.jpg">    </p:cNvPr>
           <p:cNvPicPr>
             <a:picLocks noChangeAspect="1"/>
           </p:cNvPicPr>
@@ -4859,7 +4382,7 @@
       </p:grpSpPr>
       <p:pic>
         <p:nvPicPr>
-          <p:cNvPr id="2" name="Image 0" descr="/tmp/claude-0/-home-user-MeAI/ecc740f6-0919-5f47-9404-106c0d41147b/scratchpad/deck/img_deckA/27.jpg">    </p:cNvPr>
+          <p:cNvPr id="2" name="Image 0" descr="/tmp/claude-0/-home-user-MeAI/7f4a7ba7-8b20-5496-b90b-7aeb2e1d1d67/scratchpad/ppt/final/c/27.jpg">    </p:cNvPr>
           <p:cNvPicPr>
             <a:picLocks noChangeAspect="1"/>
           </p:cNvPicPr>
@@ -4908,7 +4431,7 @@
       </p:grpSpPr>
       <p:pic>
         <p:nvPicPr>
-          <p:cNvPr id="2" name="Image 0" descr="/tmp/claude-0/-home-user-MeAI/ecc740f6-0919-5f47-9404-106c0d41147b/scratchpad/deck/img_deckA/28.jpg">    </p:cNvPr>
+          <p:cNvPr id="2" name="Image 0" descr="/tmp/claude-0/-home-user-MeAI/7f4a7ba7-8b20-5496-b90b-7aeb2e1d1d67/scratchpad/ppt/final/c/28.jpg">    </p:cNvPr>
           <p:cNvPicPr>
             <a:picLocks noChangeAspect="1"/>
           </p:cNvPicPr>
@@ -4957,7 +4480,7 @@
       </p:grpSpPr>
       <p:pic>
         <p:nvPicPr>
-          <p:cNvPr id="2" name="Image 0" descr="/tmp/claude-0/-home-user-MeAI/ecc740f6-0919-5f47-9404-106c0d41147b/scratchpad/deck/img_deckA/29.jpg">    </p:cNvPr>
+          <p:cNvPr id="2" name="Image 0" descr="/tmp/claude-0/-home-user-MeAI/7f4a7ba7-8b20-5496-b90b-7aeb2e1d1d67/scratchpad/ppt/final/c/29.jpg">    </p:cNvPr>
           <p:cNvPicPr>
             <a:picLocks noChangeAspect="1"/>
           </p:cNvPicPr>
@@ -5006,7 +4529,7 @@
       </p:grpSpPr>
       <p:pic>
         <p:nvPicPr>
-          <p:cNvPr id="2" name="Image 0" descr="/tmp/claude-0/-home-user-MeAI/ecc740f6-0919-5f47-9404-106c0d41147b/scratchpad/deck/img_deckA/03.jpg">    </p:cNvPr>
+          <p:cNvPr id="2" name="Image 0" descr="/tmp/claude-0/-home-user-MeAI/7f4a7ba7-8b20-5496-b90b-7aeb2e1d1d67/scratchpad/ppt/final/c/03.jpg">    </p:cNvPr>
           <p:cNvPicPr>
             <a:picLocks noChangeAspect="1"/>
           </p:cNvPicPr>
@@ -5036,9 +4559,9 @@
 </p:sld>
 </file>
 
-<file path=ppt/slides/slide4.xml><?xml version="1.0" encoding="utf-8"?>
+<file path=ppt/slides/slide30.xml><?xml version="1.0" encoding="utf-8"?>
 <p:sld xmlns:a="http://schemas.openxmlformats.org/drawingml/2006/main" xmlns:r="http://schemas.openxmlformats.org/officeDocument/2006/relationships" xmlns:p="http://schemas.openxmlformats.org/presentationml/2006/main">
-  <p:cSld name="Slide 4">
+  <p:cSld name="Slide 30">
     <p:spTree>
       <p:nvGrpSpPr>
         <p:cNvPr id="1" name=""/>
@@ -5055,7 +4578,7 @@
       </p:grpSpPr>
       <p:pic>
         <p:nvPicPr>
-          <p:cNvPr id="2" name="Image 0" descr="/tmp/claude-0/-home-user-MeAI/ecc740f6-0919-5f47-9404-106c0d41147b/scratchpad/deck/img_deckA/04.jpg">    </p:cNvPr>
+          <p:cNvPr id="2" name="Image 0" descr="/tmp/claude-0/-home-user-MeAI/7f4a7ba7-8b20-5496-b90b-7aeb2e1d1d67/scratchpad/ppt/final/c/30.jpg">    </p:cNvPr>
           <p:cNvPicPr>
             <a:picLocks noChangeAspect="1"/>
           </p:cNvPicPr>
@@ -5085,9 +4608,9 @@
 </p:sld>
 </file>
 
-<file path=ppt/slides/slide5.xml><?xml version="1.0" encoding="utf-8"?>
+<file path=ppt/slides/slide4.xml><?xml version="1.0" encoding="utf-8"?>
 <p:sld xmlns:a="http://schemas.openxmlformats.org/drawingml/2006/main" xmlns:r="http://schemas.openxmlformats.org/officeDocument/2006/relationships" xmlns:p="http://schemas.openxmlformats.org/presentationml/2006/main">
-  <p:cSld name="Slide 5">
+  <p:cSld name="Slide 4">
     <p:spTree>
       <p:nvGrpSpPr>
         <p:cNvPr id="1" name=""/>
@@ -5104,7 +4627,7 @@
       </p:grpSpPr>
       <p:pic>
         <p:nvPicPr>
-          <p:cNvPr id="2" name="Image 0" descr="/tmp/claude-0/-home-user-MeAI/ecc740f6-0919-5f47-9404-106c0d41147b/scratchpad/deck/img_deckA/05.jpg">    </p:cNvPr>
+          <p:cNvPr id="2" name="Image 0" descr="/tmp/claude-0/-home-user-MeAI/7f4a7ba7-8b20-5496-b90b-7aeb2e1d1d67/scratchpad/ppt/final/c/04.jpg">    </p:cNvPr>
           <p:cNvPicPr>
             <a:picLocks noChangeAspect="1"/>
           </p:cNvPicPr>
@@ -5134,9 +4657,9 @@
 </p:sld>
 </file>
 
-<file path=ppt/slides/slide6.xml><?xml version="1.0" encoding="utf-8"?>
+<file path=ppt/slides/slide5.xml><?xml version="1.0" encoding="utf-8"?>
 <p:sld xmlns:a="http://schemas.openxmlformats.org/drawingml/2006/main" xmlns:r="http://schemas.openxmlformats.org/officeDocument/2006/relationships" xmlns:p="http://schemas.openxmlformats.org/presentationml/2006/main">
-  <p:cSld name="Slide 6">
+  <p:cSld name="Slide 5">
     <p:spTree>
       <p:nvGrpSpPr>
         <p:cNvPr id="1" name=""/>
@@ -5153,7 +4676,7 @@
       </p:grpSpPr>
       <p:pic>
         <p:nvPicPr>
-          <p:cNvPr id="2" name="Image 0" descr="/tmp/claude-0/-home-user-MeAI/ecc740f6-0919-5f47-9404-106c0d41147b/scratchpad/deck/img_deckA/06.jpg">    </p:cNvPr>
+          <p:cNvPr id="2" name="Image 0" descr="/tmp/claude-0/-home-user-MeAI/7f4a7ba7-8b20-5496-b90b-7aeb2e1d1d67/scratchpad/ppt/final/c/05.jpg">    </p:cNvPr>
           <p:cNvPicPr>
             <a:picLocks noChangeAspect="1"/>
           </p:cNvPicPr>
@@ -5183,9 +4706,9 @@
 </p:sld>
 </file>
 
-<file path=ppt/slides/slide7.xml><?xml version="1.0" encoding="utf-8"?>
+<file path=ppt/slides/slide6.xml><?xml version="1.0" encoding="utf-8"?>
 <p:sld xmlns:a="http://schemas.openxmlformats.org/drawingml/2006/main" xmlns:r="http://schemas.openxmlformats.org/officeDocument/2006/relationships" xmlns:p="http://schemas.openxmlformats.org/presentationml/2006/main">
-  <p:cSld name="Slide 7">
+  <p:cSld name="Slide 6">
     <p:spTree>
       <p:nvGrpSpPr>
         <p:cNvPr id="1" name=""/>
@@ -5202,7 +4725,7 @@
       </p:grpSpPr>
       <p:pic>
         <p:nvPicPr>
-          <p:cNvPr id="2" name="Image 0" descr="/tmp/claude-0/-home-user-MeAI/ecc740f6-0919-5f47-9404-106c0d41147b/scratchpad/deck/img_deckA/07.jpg">    </p:cNvPr>
+          <p:cNvPr id="2" name="Image 0" descr="/tmp/claude-0/-home-user-MeAI/7f4a7ba7-8b20-5496-b90b-7aeb2e1d1d67/scratchpad/ppt/final/c/06.jpg">    </p:cNvPr>
           <p:cNvPicPr>
             <a:picLocks noChangeAspect="1"/>
           </p:cNvPicPr>
@@ -5232,9 +4755,9 @@
 </p:sld>
 </file>
 
-<file path=ppt/slides/slide8.xml><?xml version="1.0" encoding="utf-8"?>
+<file path=ppt/slides/slide7.xml><?xml version="1.0" encoding="utf-8"?>
 <p:sld xmlns:a="http://schemas.openxmlformats.org/drawingml/2006/main" xmlns:r="http://schemas.openxmlformats.org/officeDocument/2006/relationships" xmlns:p="http://schemas.openxmlformats.org/presentationml/2006/main">
-  <p:cSld name="Slide 8">
+  <p:cSld name="Slide 7">
     <p:spTree>
       <p:nvGrpSpPr>
         <p:cNvPr id="1" name=""/>
@@ -5251,7 +4774,7 @@
       </p:grpSpPr>
       <p:pic>
         <p:nvPicPr>
-          <p:cNvPr id="2" name="Image 0" descr="/tmp/claude-0/-home-user-MeAI/ecc740f6-0919-5f47-9404-106c0d41147b/scratchpad/deck/img_deckA/08.jpg">    </p:cNvPr>
+          <p:cNvPr id="2" name="Image 0" descr="/tmp/claude-0/-home-user-MeAI/7f4a7ba7-8b20-5496-b90b-7aeb2e1d1d67/scratchpad/ppt/final/c/07.jpg">    </p:cNvPr>
           <p:cNvPicPr>
             <a:picLocks noChangeAspect="1"/>
           </p:cNvPicPr>
@@ -5281,6 +4804,55 @@
 </p:sld>
 </file>
 
+<file path=ppt/slides/slide8.xml><?xml version="1.0" encoding="utf-8"?>
+<p:sld xmlns:a="http://schemas.openxmlformats.org/drawingml/2006/main" xmlns:r="http://schemas.openxmlformats.org/officeDocument/2006/relationships" xmlns:p="http://schemas.openxmlformats.org/presentationml/2006/main">
+  <p:cSld name="Slide 8">
+    <p:spTree>
+      <p:nvGrpSpPr>
+        <p:cNvPr id="1" name=""/>
+        <p:cNvGrpSpPr/>
+        <p:nvPr/>
+      </p:nvGrpSpPr>
+      <p:grpSpPr>
+        <a:xfrm>
+          <a:off x="0" y="0"/>
+          <a:ext cx="0" cy="0"/>
+          <a:chOff x="0" y="0"/>
+          <a:chExt cx="0" cy="0"/>
+        </a:xfrm>
+      </p:grpSpPr>
+      <p:pic>
+        <p:nvPicPr>
+          <p:cNvPr id="2" name="Image 0" descr="/tmp/claude-0/-home-user-MeAI/7f4a7ba7-8b20-5496-b90b-7aeb2e1d1d67/scratchpad/ppt/final/c/08.jpg">    </p:cNvPr>
+          <p:cNvPicPr>
+            <a:picLocks noChangeAspect="1"/>
+          </p:cNvPicPr>
+          <p:nvPr/>
+        </p:nvPicPr>
+        <p:blipFill>
+          <a:blip r:embed="rId1"/>
+          <a:stretch>
+            <a:fillRect/>
+          </a:stretch>
+        </p:blipFill>
+        <p:spPr>
+          <a:xfrm>
+            <a:off x="0" y="0"/>
+            <a:ext cx="12191695" cy="6858000"/>
+          </a:xfrm>
+          <a:prstGeom prst="rect">
+            <a:avLst/>
+          </a:prstGeom>
+        </p:spPr>
+      </p:pic>
+    </p:spTree>
+  </p:cSld>
+  <p:clrMapOvr>
+    <a:masterClrMapping/>
+  </p:clrMapOvr>
+</p:sld>
+</file>
+
 <file path=ppt/slides/slide9.xml><?xml version="1.0" encoding="utf-8"?>
 <p:sld xmlns:a="http://schemas.openxmlformats.org/drawingml/2006/main" xmlns:r="http://schemas.openxmlformats.org/officeDocument/2006/relationships" xmlns:p="http://schemas.openxmlformats.org/presentationml/2006/main">
   <p:cSld name="Slide 9">
@@ -5300,7 +4872,7 @@
       </p:grpSpPr>
       <p:pic>
         <p:nvPicPr>
-          <p:cNvPr id="2" name="Image 0" descr="/tmp/claude-0/-home-user-MeAI/ecc740f6-0919-5f47-9404-106c0d41147b/scratchpad/deck/img_deckA/09.jpg">    </p:cNvPr>
+          <p:cNvPr id="2" name="Image 0" descr="/tmp/claude-0/-home-user-MeAI/7f4a7ba7-8b20-5496-b90b-7aeb2e1d1d67/scratchpad/ppt/final/c/09.jpg">    </p:cNvPr>
           <p:cNvPicPr>
             <a:picLocks noChangeAspect="1"/>
           </p:cNvPicPr>
